--- a/Reporte 230626.pptx
+++ b/Reporte 230626.pptx
@@ -6510,10 +6510,10 @@
       </p:sp>
       <p:pic>
         <p:nvPicPr>
-          <p:cNvPr id="5" name="Imagen 4">
+          <p:cNvPr id="4" name="Imagen 3">
             <a:extLst>
               <a:ext uri="{FF2B5EF4-FFF2-40B4-BE49-F238E27FC236}">
-                <a16:creationId xmlns:a16="http://schemas.microsoft.com/office/drawing/2014/main" id="{36EF7AD8-DC16-3E77-1CA3-00135DFD7FDF}"/>
+                <a16:creationId xmlns:a16="http://schemas.microsoft.com/office/drawing/2014/main" id="{7A738124-AC9E-44F1-FA9A-91110BD551C6}"/>
               </a:ext>
             </a:extLst>
           </p:cNvPr>
@@ -6530,8 +6530,8 @@
         </p:blipFill>
         <p:spPr>
           <a:xfrm>
-            <a:off x="0" y="667539"/>
-            <a:ext cx="9144000" cy="3951298"/>
+            <a:off x="0" y="779104"/>
+            <a:ext cx="9144000" cy="3585291"/>
           </a:xfrm>
           <a:prstGeom prst="rect">
             <a:avLst/>
@@ -6608,10 +6608,10 @@
       </p:sp>
       <p:pic>
         <p:nvPicPr>
-          <p:cNvPr id="4" name="Imagen 3">
+          <p:cNvPr id="3" name="Imagen 2">
             <a:extLst>
               <a:ext uri="{FF2B5EF4-FFF2-40B4-BE49-F238E27FC236}">
-                <a16:creationId xmlns:a16="http://schemas.microsoft.com/office/drawing/2014/main" id="{82F72DA8-40D4-4DAE-37C3-9534D2C83CFA}"/>
+                <a16:creationId xmlns:a16="http://schemas.microsoft.com/office/drawing/2014/main" id="{CFFAA655-0F52-2415-7046-22E2D05647DF}"/>
               </a:ext>
             </a:extLst>
           </p:cNvPr>
@@ -6628,8 +6628,8 @@
         </p:blipFill>
         <p:spPr>
           <a:xfrm>
-            <a:off x="-6725" y="1162368"/>
-            <a:ext cx="9144000" cy="2961640"/>
+            <a:off x="0" y="1442577"/>
+            <a:ext cx="9144000" cy="2632746"/>
           </a:xfrm>
           <a:prstGeom prst="rect">
             <a:avLst/>
@@ -6712,10 +6712,10 @@
       </p:sp>
       <p:pic>
         <p:nvPicPr>
-          <p:cNvPr id="4" name="Imagen 3">
+          <p:cNvPr id="3" name="Imagen 2">
             <a:extLst>
               <a:ext uri="{FF2B5EF4-FFF2-40B4-BE49-F238E27FC236}">
-                <a16:creationId xmlns:a16="http://schemas.microsoft.com/office/drawing/2014/main" id="{174EE023-EF9D-57AA-4F84-E2D0E8D1B292}"/>
+                <a16:creationId xmlns:a16="http://schemas.microsoft.com/office/drawing/2014/main" id="{6C3FD308-1AF1-CDC8-CE51-5353666BF7E7}"/>
               </a:ext>
             </a:extLst>
           </p:cNvPr>
@@ -6732,8 +6732,8 @@
         </p:blipFill>
         <p:spPr>
           <a:xfrm>
-            <a:off x="0" y="482977"/>
-            <a:ext cx="9144000" cy="4320422"/>
+            <a:off x="0" y="967589"/>
+            <a:ext cx="9144000" cy="3208322"/>
           </a:xfrm>
           <a:prstGeom prst="rect">
             <a:avLst/>
@@ -6810,10 +6810,10 @@
       </p:sp>
       <p:pic>
         <p:nvPicPr>
-          <p:cNvPr id="4" name="Imagen 3">
+          <p:cNvPr id="5" name="Imagen 4">
             <a:extLst>
               <a:ext uri="{FF2B5EF4-FFF2-40B4-BE49-F238E27FC236}">
-                <a16:creationId xmlns:a16="http://schemas.microsoft.com/office/drawing/2014/main" id="{11959E18-E124-11EF-419B-87C06A3326E9}"/>
+                <a16:creationId xmlns:a16="http://schemas.microsoft.com/office/drawing/2014/main" id="{C266AA9B-F4B7-AD64-B49A-36744BC9DA69}"/>
               </a:ext>
             </a:extLst>
           </p:cNvPr>
@@ -6830,8 +6830,8 @@
         </p:blipFill>
         <p:spPr>
           <a:xfrm>
-            <a:off x="-6725" y="1093745"/>
-            <a:ext cx="9144000" cy="3098885"/>
+            <a:off x="0" y="1235640"/>
+            <a:ext cx="9144000" cy="2815096"/>
           </a:xfrm>
           <a:prstGeom prst="rect">
             <a:avLst/>
@@ -6908,10 +6908,10 @@
       </p:sp>
       <p:pic>
         <p:nvPicPr>
-          <p:cNvPr id="3" name="Imagen 2">
+          <p:cNvPr id="4" name="Imagen 3">
             <a:extLst>
               <a:ext uri="{FF2B5EF4-FFF2-40B4-BE49-F238E27FC236}">
-                <a16:creationId xmlns:a16="http://schemas.microsoft.com/office/drawing/2014/main" id="{C7877CF1-820F-5D54-5863-C9190864EC72}"/>
+                <a16:creationId xmlns:a16="http://schemas.microsoft.com/office/drawing/2014/main" id="{941A173D-9E1A-BD40-E483-DBD524169862}"/>
               </a:ext>
             </a:extLst>
           </p:cNvPr>
@@ -6928,8 +6928,8 @@
         </p:blipFill>
         <p:spPr>
           <a:xfrm>
-            <a:off x="0" y="451547"/>
-            <a:ext cx="9144000" cy="4383282"/>
+            <a:off x="0" y="733750"/>
+            <a:ext cx="9144000" cy="3818875"/>
           </a:xfrm>
           <a:prstGeom prst="rect">
             <a:avLst/>
@@ -7006,10 +7006,10 @@
       </p:sp>
       <p:pic>
         <p:nvPicPr>
-          <p:cNvPr id="4" name="Imagen 3">
+          <p:cNvPr id="3" name="Imagen 2">
             <a:extLst>
               <a:ext uri="{FF2B5EF4-FFF2-40B4-BE49-F238E27FC236}">
-                <a16:creationId xmlns:a16="http://schemas.microsoft.com/office/drawing/2014/main" id="{3B71AB38-F620-46FD-7ADA-1924918FDD36}"/>
+                <a16:creationId xmlns:a16="http://schemas.microsoft.com/office/drawing/2014/main" id="{A696C7E4-3F38-E263-D3D0-EC51A32EDFF7}"/>
               </a:ext>
             </a:extLst>
           </p:cNvPr>
@@ -7026,8 +7026,8 @@
         </p:blipFill>
         <p:spPr>
           <a:xfrm>
-            <a:off x="-1" y="901651"/>
-            <a:ext cx="9144000" cy="3483073"/>
+            <a:off x="0" y="400674"/>
+            <a:ext cx="9144000" cy="4342151"/>
           </a:xfrm>
           <a:prstGeom prst="rect">
             <a:avLst/>
